--- a/book/slides/pptx/ch11-index.pptx
+++ b/book/slides/pptx/ch11-index.pptx
@@ -8351,7 +8351,7 @@
                 <a:ea typeface="Noto Sans CJK SC"/>
                 <a:cs typeface="Segoe UI"/>
               </a:rPr>
-              <a:t>11.5 位图索引（续）</a:t>
+              <a:t>11.5 位图索引</a:t>
             </a:r>
           </a:p>
         </p:txBody>

--- a/book/slides/pptx/ch11-index.pptx
+++ b/book/slides/pptx/ch11-index.pptx
@@ -8351,7 +8351,7 @@
                 <a:ea typeface="Noto Sans CJK SC"/>
                 <a:cs typeface="Segoe UI"/>
               </a:rPr>
-              <a:t>11.5 位图索引</a:t>
+              <a:t>11.5 位图索引（续）</a:t>
             </a:r>
           </a:p>
         </p:txBody>
